--- a/Submitted/all_members_layout.pptx
+++ b/Submitted/all_members_layout.pptx
@@ -112,321 +112,109 @@
 </p:presentation>
 </file>
 
-<file path=ppt/revisionInfo.xml><?xml version="1.0" encoding="utf-8"?>
-<p1510:revInfo xmlns:a="http://schemas.openxmlformats.org/drawingml/2006/main" xmlns:r="http://schemas.openxmlformats.org/officeDocument/2006/relationships" xmlns:p1510="http://schemas.microsoft.com/office/powerpoint/2015/10/main">
-  <p1510:revLst>
-    <p1510:client id="{FFC7C28A-90AB-41EC-8EE4-EA37B422B1AF}" v="28" dt="2025-08-13T02:07:35.757"/>
-  </p1510:revLst>
-</p1510:revInfo>
-</file>
-
 <file path=ppt/changesInfos/changesInfo1.xml><?xml version="1.0" encoding="utf-8"?>
 <pc:chgInfo xmlns:a="http://schemas.openxmlformats.org/drawingml/2006/main" xmlns:r="http://schemas.openxmlformats.org/officeDocument/2006/relationships" xmlns:ac="http://schemas.microsoft.com/office/drawing/2013/main/command" xmlns:pc="http://schemas.microsoft.com/office/powerpoint/2013/main/command">
   <pc:docChgLst>
-    <pc:chgData name="Noritsuna Imamura" userId="5b2da16fa1785921" providerId="LiveId" clId="{660BBE2E-30E1-8D43-A088-0D8AFA91A020}"/>
-    <pc:docChg chg="modSld">
-      <pc:chgData name="Noritsuna Imamura" userId="5b2da16fa1785921" providerId="LiveId" clId="{660BBE2E-30E1-8D43-A088-0D8AFA91A020}" dt="2025-08-13T08:31:23.725" v="0" actId="20577"/>
+    <pc:chgData name="Noritsuna Imamura" userId="5b2da16fa1785921" providerId="LiveId" clId="{342DA2C4-B094-4B86-9045-6AA34CD7B848}"/>
+    <pc:docChg chg="undo custSel modSld">
+      <pc:chgData name="Noritsuna Imamura" userId="5b2da16fa1785921" providerId="LiveId" clId="{342DA2C4-B094-4B86-9045-6AA34CD7B848}" dt="2026-03-05T05:39:15.573" v="70" actId="14100"/>
       <pc:docMkLst>
         <pc:docMk/>
       </pc:docMkLst>
       <pc:sldChg chg="modSp mod">
-        <pc:chgData name="Noritsuna Imamura" userId="5b2da16fa1785921" providerId="LiveId" clId="{660BBE2E-30E1-8D43-A088-0D8AFA91A020}" dt="2025-08-13T08:31:23.725" v="0" actId="20577"/>
+        <pc:chgData name="Noritsuna Imamura" userId="5b2da16fa1785921" providerId="LiveId" clId="{342DA2C4-B094-4B86-9045-6AA34CD7B848}" dt="2026-03-05T05:39:15.573" v="70" actId="14100"/>
         <pc:sldMkLst>
           <pc:docMk/>
           <pc:sldMk cId="2151164813" sldId="257"/>
         </pc:sldMkLst>
         <pc:spChg chg="mod">
-          <ac:chgData name="Noritsuna Imamura" userId="5b2da16fa1785921" providerId="LiveId" clId="{660BBE2E-30E1-8D43-A088-0D8AFA91A020}" dt="2025-08-13T08:31:23.725" v="0" actId="20577"/>
-          <ac:spMkLst>
-            <pc:docMk/>
-            <pc:sldMk cId="2151164813" sldId="257"/>
-            <ac:spMk id="20" creationId="{38BB061A-015A-716D-6A03-1548A217AD1B}"/>
-          </ac:spMkLst>
-        </pc:spChg>
-      </pc:sldChg>
-    </pc:docChg>
-  </pc:docChgLst>
-  <pc:docChgLst>
-    <pc:chgData name="Noritsuna Imamura" userId="5b2da16fa1785921" providerId="LiveId" clId="{FFC7C28A-90AB-41EC-8EE4-EA37B422B1AF}"/>
-    <pc:docChg chg="undo custSel addSld delSld modSld">
-      <pc:chgData name="Noritsuna Imamura" userId="5b2da16fa1785921" providerId="LiveId" clId="{FFC7C28A-90AB-41EC-8EE4-EA37B422B1AF}" dt="2025-08-13T02:09:22.207" v="522" actId="2"/>
-      <pc:docMkLst>
-        <pc:docMk/>
-      </pc:docMkLst>
-      <pc:sldChg chg="del">
-        <pc:chgData name="Noritsuna Imamura" userId="5b2da16fa1785921" providerId="LiveId" clId="{FFC7C28A-90AB-41EC-8EE4-EA37B422B1AF}" dt="2025-08-13T01:55:25.723" v="14" actId="47"/>
-        <pc:sldMkLst>
-          <pc:docMk/>
-          <pc:sldMk cId="2490710203" sldId="256"/>
-        </pc:sldMkLst>
-      </pc:sldChg>
-      <pc:sldChg chg="addSp delSp modSp del mod">
-        <pc:chgData name="Noritsuna Imamura" userId="5b2da16fa1785921" providerId="LiveId" clId="{FFC7C28A-90AB-41EC-8EE4-EA37B422B1AF}" dt="2025-08-13T01:54:05.849" v="1" actId="2696"/>
-        <pc:sldMkLst>
-          <pc:docMk/>
-          <pc:sldMk cId="335451174" sldId="257"/>
-        </pc:sldMkLst>
-        <pc:spChg chg="add mod">
-          <ac:chgData name="Noritsuna Imamura" userId="5b2da16fa1785921" providerId="LiveId" clId="{FFC7C28A-90AB-41EC-8EE4-EA37B422B1AF}" dt="2025-08-13T01:54:02.556" v="0" actId="478"/>
-          <ac:spMkLst>
-            <pc:docMk/>
-            <pc:sldMk cId="335451174" sldId="257"/>
-            <ac:spMk id="3" creationId="{230E082B-F423-8DAB-6D54-C72EA9AF6E92}"/>
-          </ac:spMkLst>
-        </pc:spChg>
-        <pc:picChg chg="del">
-          <ac:chgData name="Noritsuna Imamura" userId="5b2da16fa1785921" providerId="LiveId" clId="{FFC7C28A-90AB-41EC-8EE4-EA37B422B1AF}" dt="2025-08-13T01:54:02.556" v="0" actId="478"/>
-          <ac:picMkLst>
-            <pc:docMk/>
-            <pc:sldMk cId="335451174" sldId="257"/>
-            <ac:picMk id="5" creationId="{C22BFECF-44B4-CEF2-7C99-25F5B482BEB0}"/>
-          </ac:picMkLst>
-        </pc:picChg>
-      </pc:sldChg>
-      <pc:sldChg chg="addSp delSp modSp new mod">
-        <pc:chgData name="Noritsuna Imamura" userId="5b2da16fa1785921" providerId="LiveId" clId="{FFC7C28A-90AB-41EC-8EE4-EA37B422B1AF}" dt="2025-08-13T02:09:22.207" v="522" actId="2"/>
-        <pc:sldMkLst>
-          <pc:docMk/>
-          <pc:sldMk cId="2151164813" sldId="257"/>
-        </pc:sldMkLst>
-        <pc:spChg chg="del">
-          <ac:chgData name="Noritsuna Imamura" userId="5b2da16fa1785921" providerId="LiveId" clId="{FFC7C28A-90AB-41EC-8EE4-EA37B422B1AF}" dt="2025-08-13T01:54:18.884" v="4" actId="478"/>
-          <ac:spMkLst>
-            <pc:docMk/>
-            <pc:sldMk cId="2151164813" sldId="257"/>
-            <ac:spMk id="2" creationId="{E5959AB2-23A6-94DB-C494-08F4BF3145D4}"/>
-          </ac:spMkLst>
-        </pc:spChg>
-        <pc:spChg chg="del">
-          <ac:chgData name="Noritsuna Imamura" userId="5b2da16fa1785921" providerId="LiveId" clId="{FFC7C28A-90AB-41EC-8EE4-EA37B422B1AF}" dt="2025-08-13T01:54:16.655" v="3" actId="478"/>
-          <ac:spMkLst>
-            <pc:docMk/>
-            <pc:sldMk cId="2151164813" sldId="257"/>
-            <ac:spMk id="3" creationId="{A029F137-616C-2F18-0C19-BC48923773DB}"/>
-          </ac:spMkLst>
-        </pc:spChg>
-        <pc:spChg chg="add mod">
-          <ac:chgData name="Noritsuna Imamura" userId="5b2da16fa1785921" providerId="LiveId" clId="{FFC7C28A-90AB-41EC-8EE4-EA37B422B1AF}" dt="2025-08-13T02:09:19.043" v="517" actId="2"/>
+          <ac:chgData name="Noritsuna Imamura" userId="5b2da16fa1785921" providerId="LiveId" clId="{342DA2C4-B094-4B86-9045-6AA34CD7B848}" dt="2026-03-05T05:38:12.435" v="17" actId="14100"/>
           <ac:spMkLst>
             <pc:docMk/>
             <pc:sldMk cId="2151164813" sldId="257"/>
             <ac:spMk id="6" creationId="{D6904798-B6C0-FEC3-48BB-B4FD87304165}"/>
           </ac:spMkLst>
         </pc:spChg>
-        <pc:spChg chg="add mod">
-          <ac:chgData name="Noritsuna Imamura" userId="5b2da16fa1785921" providerId="LiveId" clId="{FFC7C28A-90AB-41EC-8EE4-EA37B422B1AF}" dt="2025-08-13T01:56:47.889" v="83" actId="20577"/>
+        <pc:spChg chg="mod">
+          <ac:chgData name="Noritsuna Imamura" userId="5b2da16fa1785921" providerId="LiveId" clId="{342DA2C4-B094-4B86-9045-6AA34CD7B848}" dt="2026-03-05T05:36:57.592" v="3" actId="14100"/>
           <ac:spMkLst>
             <pc:docMk/>
             <pc:sldMk cId="2151164813" sldId="257"/>
             <ac:spMk id="7" creationId="{433C2068-6551-255B-A03B-981E6277069F}"/>
           </ac:spMkLst>
         </pc:spChg>
-        <pc:spChg chg="add mod">
-          <ac:chgData name="Noritsuna Imamura" userId="5b2da16fa1785921" providerId="LiveId" clId="{FFC7C28A-90AB-41EC-8EE4-EA37B422B1AF}" dt="2025-08-13T01:55:04.069" v="10"/>
-          <ac:spMkLst>
-            <pc:docMk/>
-            <pc:sldMk cId="2151164813" sldId="257"/>
-            <ac:spMk id="8" creationId="{6D5AFAA1-7137-D79C-528D-5EA9268FC0BD}"/>
-          </ac:spMkLst>
-        </pc:spChg>
-        <pc:spChg chg="add del mod">
-          <ac:chgData name="Noritsuna Imamura" userId="5b2da16fa1785921" providerId="LiveId" clId="{FFC7C28A-90AB-41EC-8EE4-EA37B422B1AF}" dt="2025-08-13T01:55:23.873" v="13" actId="478"/>
-          <ac:spMkLst>
-            <pc:docMk/>
-            <pc:sldMk cId="2151164813" sldId="257"/>
-            <ac:spMk id="9" creationId="{AA9FE3F0-D9C4-DA01-2607-316D5C6BE651}"/>
-          </ac:spMkLst>
-        </pc:spChg>
-        <pc:spChg chg="add mod">
-          <ac:chgData name="Noritsuna Imamura" userId="5b2da16fa1785921" providerId="LiveId" clId="{FFC7C28A-90AB-41EC-8EE4-EA37B422B1AF}" dt="2025-08-13T01:56:25.993" v="63" actId="14100"/>
-          <ac:spMkLst>
-            <pc:docMk/>
-            <pc:sldMk cId="2151164813" sldId="257"/>
-            <ac:spMk id="10" creationId="{E3EFAB4C-CF8F-E22E-4626-D0212ED91FAD}"/>
-          </ac:spMkLst>
-        </pc:spChg>
-        <pc:spChg chg="add mod ord">
-          <ac:chgData name="Noritsuna Imamura" userId="5b2da16fa1785921" providerId="LiveId" clId="{FFC7C28A-90AB-41EC-8EE4-EA37B422B1AF}" dt="2025-08-13T02:08:50.763" v="513" actId="1076"/>
-          <ac:spMkLst>
-            <pc:docMk/>
-            <pc:sldMk cId="2151164813" sldId="257"/>
-            <ac:spMk id="11" creationId="{C3F682CB-B72C-85F5-2E13-FDF8DB342732}"/>
-          </ac:spMkLst>
-        </pc:spChg>
-        <pc:spChg chg="add mod">
-          <ac:chgData name="Noritsuna Imamura" userId="5b2da16fa1785921" providerId="LiveId" clId="{FFC7C28A-90AB-41EC-8EE4-EA37B422B1AF}" dt="2025-08-13T02:04:20.752" v="342" actId="20577"/>
-          <ac:spMkLst>
-            <pc:docMk/>
-            <pc:sldMk cId="2151164813" sldId="257"/>
-            <ac:spMk id="12" creationId="{12251C8C-9E92-1867-1E9C-8F4D58DC6543}"/>
-          </ac:spMkLst>
-        </pc:spChg>
-        <pc:spChg chg="add mod">
-          <ac:chgData name="Noritsuna Imamura" userId="5b2da16fa1785921" providerId="LiveId" clId="{FFC7C28A-90AB-41EC-8EE4-EA37B422B1AF}" dt="2025-08-13T01:57:38.861" v="134" actId="14100"/>
-          <ac:spMkLst>
-            <pc:docMk/>
-            <pc:sldMk cId="2151164813" sldId="257"/>
-            <ac:spMk id="13" creationId="{935798A6-2E94-990B-7238-091094160023}"/>
-          </ac:spMkLst>
-        </pc:spChg>
-        <pc:spChg chg="add mod ord">
-          <ac:chgData name="Noritsuna Imamura" userId="5b2da16fa1785921" providerId="LiveId" clId="{FFC7C28A-90AB-41EC-8EE4-EA37B422B1AF}" dt="2025-08-13T01:58:19.859" v="145" actId="166"/>
-          <ac:spMkLst>
-            <pc:docMk/>
-            <pc:sldMk cId="2151164813" sldId="257"/>
-            <ac:spMk id="14" creationId="{7BE9E000-EA60-C864-1F32-1B1F1F350F1E}"/>
-          </ac:spMkLst>
-        </pc:spChg>
-        <pc:spChg chg="add mod">
-          <ac:chgData name="Noritsuna Imamura" userId="5b2da16fa1785921" providerId="LiveId" clId="{FFC7C28A-90AB-41EC-8EE4-EA37B422B1AF}" dt="2025-08-13T01:58:05.005" v="144" actId="14100"/>
-          <ac:spMkLst>
-            <pc:docMk/>
-            <pc:sldMk cId="2151164813" sldId="257"/>
-            <ac:spMk id="15" creationId="{3BFE8146-DD49-3B77-58F5-939747EBFB2F}"/>
-          </ac:spMkLst>
-        </pc:spChg>
-        <pc:spChg chg="add mod">
-          <ac:chgData name="Noritsuna Imamura" userId="5b2da16fa1785921" providerId="LiveId" clId="{FFC7C28A-90AB-41EC-8EE4-EA37B422B1AF}" dt="2025-08-13T02:09:19.747" v="518" actId="2"/>
-          <ac:spMkLst>
-            <pc:docMk/>
-            <pc:sldMk cId="2151164813" sldId="257"/>
-            <ac:spMk id="16" creationId="{668EBFD9-BA1F-4F45-78C8-0DA023447C3E}"/>
-          </ac:spMkLst>
-        </pc:spChg>
-        <pc:spChg chg="add mod">
-          <ac:chgData name="Noritsuna Imamura" userId="5b2da16fa1785921" providerId="LiveId" clId="{FFC7C28A-90AB-41EC-8EE4-EA37B422B1AF}" dt="2025-08-13T02:09:21.412" v="521" actId="2"/>
+        <pc:spChg chg="mod">
+          <ac:chgData name="Noritsuna Imamura" userId="5b2da16fa1785921" providerId="LiveId" clId="{342DA2C4-B094-4B86-9045-6AA34CD7B848}" dt="2026-03-05T05:39:15.573" v="70" actId="14100"/>
           <ac:spMkLst>
             <pc:docMk/>
             <pc:sldMk cId="2151164813" sldId="257"/>
             <ac:spMk id="17" creationId="{CDAF093A-1871-8F69-3BAF-EE844FA64FFB}"/>
           </ac:spMkLst>
         </pc:spChg>
-        <pc:spChg chg="add mod">
-          <ac:chgData name="Noritsuna Imamura" userId="5b2da16fa1785921" providerId="LiveId" clId="{FFC7C28A-90AB-41EC-8EE4-EA37B422B1AF}" dt="2025-08-13T02:07:07.610" v="442" actId="20577"/>
+        <pc:spChg chg="mod">
+          <ac:chgData name="Noritsuna Imamura" userId="5b2da16fa1785921" providerId="LiveId" clId="{342DA2C4-B094-4B86-9045-6AA34CD7B848}" dt="2026-03-05T05:37:42.276" v="15" actId="14100"/>
           <ac:spMkLst>
             <pc:docMk/>
             <pc:sldMk cId="2151164813" sldId="257"/>
             <ac:spMk id="18" creationId="{3FC70A58-7F90-2852-AE75-81363DAC3CC6}"/>
           </ac:spMkLst>
         </pc:spChg>
-        <pc:spChg chg="add mod">
-          <ac:chgData name="Noritsuna Imamura" userId="5b2da16fa1785921" providerId="LiveId" clId="{FFC7C28A-90AB-41EC-8EE4-EA37B422B1AF}" dt="2025-08-13T02:07:55.770" v="496" actId="20577"/>
+        <pc:spChg chg="mod">
+          <ac:chgData name="Noritsuna Imamura" userId="5b2da16fa1785921" providerId="LiveId" clId="{342DA2C4-B094-4B86-9045-6AA34CD7B848}" dt="2026-03-05T05:39:01.166" v="66" actId="14100"/>
           <ac:spMkLst>
             <pc:docMk/>
             <pc:sldMk cId="2151164813" sldId="257"/>
             <ac:spMk id="19" creationId="{43DE7EB4-7EE4-6829-6B02-6AB95DA3BC42}"/>
           </ac:spMkLst>
         </pc:spChg>
-        <pc:spChg chg="add mod">
-          <ac:chgData name="Noritsuna Imamura" userId="5b2da16fa1785921" providerId="LiveId" clId="{FFC7C28A-90AB-41EC-8EE4-EA37B422B1AF}" dt="2025-08-13T02:04:34.546" v="346" actId="14100"/>
-          <ac:spMkLst>
-            <pc:docMk/>
-            <pc:sldMk cId="2151164813" sldId="257"/>
-            <ac:spMk id="20" creationId="{38BB061A-015A-716D-6A03-1548A217AD1B}"/>
-          </ac:spMkLst>
-        </pc:spChg>
-        <pc:spChg chg="add mod">
-          <ac:chgData name="Noritsuna Imamura" userId="5b2da16fa1785921" providerId="LiveId" clId="{FFC7C28A-90AB-41EC-8EE4-EA37B422B1AF}" dt="2025-08-13T02:09:22.207" v="522" actId="2"/>
-          <ac:spMkLst>
-            <pc:docMk/>
-            <pc:sldMk cId="2151164813" sldId="257"/>
-            <ac:spMk id="21" creationId="{4759F3CA-ABA9-F2B7-F25A-615E70727DFF}"/>
-          </ac:spMkLst>
-        </pc:spChg>
-        <pc:spChg chg="add mod">
-          <ac:chgData name="Noritsuna Imamura" userId="5b2da16fa1785921" providerId="LiveId" clId="{FFC7C28A-90AB-41EC-8EE4-EA37B422B1AF}" dt="2025-08-13T02:03:46.418" v="291" actId="20577"/>
-          <ac:spMkLst>
-            <pc:docMk/>
-            <pc:sldMk cId="2151164813" sldId="257"/>
-            <ac:spMk id="22" creationId="{4AE4C973-188D-735F-A999-AB379034FB83}"/>
-          </ac:spMkLst>
-        </pc:spChg>
-        <pc:spChg chg="add mod ord">
-          <ac:chgData name="Noritsuna Imamura" userId="5b2da16fa1785921" providerId="LiveId" clId="{FFC7C28A-90AB-41EC-8EE4-EA37B422B1AF}" dt="2025-08-13T02:06:37.786" v="432" actId="14100"/>
+        <pc:spChg chg="mod">
+          <ac:chgData name="Noritsuna Imamura" userId="5b2da16fa1785921" providerId="LiveId" clId="{342DA2C4-B094-4B86-9045-6AA34CD7B848}" dt="2026-03-05T05:36:50.154" v="1" actId="14100"/>
           <ac:spMkLst>
             <pc:docMk/>
             <pc:sldMk cId="2151164813" sldId="257"/>
             <ac:spMk id="23" creationId="{22C5C57E-C84A-1082-AFD6-61C4C1AA11DE}"/>
           </ac:spMkLst>
         </pc:spChg>
-        <pc:spChg chg="add del mod">
-          <ac:chgData name="Noritsuna Imamura" userId="5b2da16fa1785921" providerId="LiveId" clId="{FFC7C28A-90AB-41EC-8EE4-EA37B422B1AF}" dt="2025-08-13T02:05:22.216" v="373" actId="478"/>
-          <ac:spMkLst>
-            <pc:docMk/>
-            <pc:sldMk cId="2151164813" sldId="257"/>
-            <ac:spMk id="24" creationId="{45BEB61B-D844-7E54-FBB2-F92CE6EE1572}"/>
-          </ac:spMkLst>
-        </pc:spChg>
-        <pc:spChg chg="add mod">
-          <ac:chgData name="Noritsuna Imamura" userId="5b2da16fa1785921" providerId="LiveId" clId="{FFC7C28A-90AB-41EC-8EE4-EA37B422B1AF}" dt="2025-08-13T02:05:58.215" v="409" actId="20577"/>
+        <pc:spChg chg="mod">
+          <ac:chgData name="Noritsuna Imamura" userId="5b2da16fa1785921" providerId="LiveId" clId="{342DA2C4-B094-4B86-9045-6AA34CD7B848}" dt="2026-03-05T05:37:08.122" v="6" actId="14100"/>
           <ac:spMkLst>
             <pc:docMk/>
             <pc:sldMk cId="2151164813" sldId="257"/>
             <ac:spMk id="25" creationId="{D110073B-4E75-692B-930B-A8522055F3BF}"/>
           </ac:spMkLst>
         </pc:spChg>
-        <pc:spChg chg="add mod">
-          <ac:chgData name="Noritsuna Imamura" userId="5b2da16fa1785921" providerId="LiveId" clId="{FFC7C28A-90AB-41EC-8EE4-EA37B422B1AF}" dt="2025-08-13T02:08:52.838" v="514" actId="1076"/>
+        <pc:spChg chg="mod">
+          <ac:chgData name="Noritsuna Imamura" userId="5b2da16fa1785921" providerId="LiveId" clId="{342DA2C4-B094-4B86-9045-6AA34CD7B848}" dt="2026-03-05T05:37:34.857" v="13" actId="14100"/>
           <ac:spMkLst>
             <pc:docMk/>
             <pc:sldMk cId="2151164813" sldId="257"/>
             <ac:spMk id="26" creationId="{B117BD42-5049-438F-B3B2-C99D7E2D9BB6}"/>
           </ac:spMkLst>
         </pc:spChg>
-        <pc:spChg chg="add mod">
-          <ac:chgData name="Noritsuna Imamura" userId="5b2da16fa1785921" providerId="LiveId" clId="{FFC7C28A-90AB-41EC-8EE4-EA37B422B1AF}" dt="2025-08-13T02:09:17.708" v="515" actId="2"/>
+        <pc:spChg chg="mod">
+          <ac:chgData name="Noritsuna Imamura" userId="5b2da16fa1785921" providerId="LiveId" clId="{342DA2C4-B094-4B86-9045-6AA34CD7B848}" dt="2026-03-05T05:38:54.573" v="64" actId="14100"/>
           <ac:spMkLst>
             <pc:docMk/>
             <pc:sldMk cId="2151164813" sldId="257"/>
             <ac:spMk id="27" creationId="{FE4E8FFC-84D0-FF67-673D-8C51C9A7DADC}"/>
           </ac:spMkLst>
         </pc:spChg>
-        <pc:spChg chg="add mod">
-          <ac:chgData name="Noritsuna Imamura" userId="5b2da16fa1785921" providerId="LiveId" clId="{FFC7C28A-90AB-41EC-8EE4-EA37B422B1AF}" dt="2025-08-13T02:09:18.375" v="516" actId="2"/>
+        <pc:spChg chg="mod">
+          <ac:chgData name="Noritsuna Imamura" userId="5b2da16fa1785921" providerId="LiveId" clId="{342DA2C4-B094-4B86-9045-6AA34CD7B848}" dt="2026-03-05T05:38:57.971" v="65" actId="14100"/>
           <ac:spMkLst>
             <pc:docMk/>
             <pc:sldMk cId="2151164813" sldId="257"/>
             <ac:spMk id="28" creationId="{D2664EB4-D172-2BDC-8586-28DE4A04F5F1}"/>
           </ac:spMkLst>
         </pc:spChg>
-        <pc:picChg chg="add mod">
-          <ac:chgData name="Noritsuna Imamura" userId="5b2da16fa1785921" providerId="LiveId" clId="{FFC7C28A-90AB-41EC-8EE4-EA37B422B1AF}" dt="2025-08-13T01:54:32.224" v="7" actId="962"/>
+        <pc:picChg chg="mod">
+          <ac:chgData name="Noritsuna Imamura" userId="5b2da16fa1785921" providerId="LiveId" clId="{342DA2C4-B094-4B86-9045-6AA34CD7B848}" dt="2026-03-05T05:37:12.679" v="8" actId="1076"/>
           <ac:picMkLst>
             <pc:docMk/>
             <pc:sldMk cId="2151164813" sldId="257"/>
             <ac:picMk id="5" creationId="{BA8D9416-12F6-11B7-47AC-ADD236039DCB}"/>
           </ac:picMkLst>
         </pc:picChg>
-      </pc:sldChg>
-    </pc:docChg>
-  </pc:docChgLst>
-  <pc:docChgLst>
-    <pc:chgData name="Noritsuna Imamura" userId="5b2da16fa1785921" providerId="LiveId" clId="{0D468939-C473-42F4-B7BF-FD9FD8C90BA5}"/>
-    <pc:docChg chg="undo custSel addSld delSld modSld sldOrd">
-      <pc:chgData name="Noritsuna Imamura" userId="5b2da16fa1785921" providerId="LiveId" clId="{0D468939-C473-42F4-B7BF-FD9FD8C90BA5}" dt="2024-08-14T12:19:53.614" v="405" actId="47"/>
-      <pc:docMkLst>
-        <pc:docMk/>
-      </pc:docMkLst>
-      <pc:sldChg chg="addSp delSp modSp new mod">
-        <pc:chgData name="Noritsuna Imamura" userId="5b2da16fa1785921" providerId="LiveId" clId="{0D468939-C473-42F4-B7BF-FD9FD8C90BA5}" dt="2024-08-13T15:29:16.790" v="344" actId="14100"/>
-        <pc:sldMkLst>
-          <pc:docMk/>
-          <pc:sldMk cId="2490710203" sldId="256"/>
-        </pc:sldMkLst>
-      </pc:sldChg>
-      <pc:sldChg chg="addSp delSp modSp new mod ord">
-        <pc:chgData name="Noritsuna Imamura" userId="5b2da16fa1785921" providerId="LiveId" clId="{0D468939-C473-42F4-B7BF-FD9FD8C90BA5}" dt="2024-08-14T12:19:51.393" v="404"/>
-        <pc:sldMkLst>
-          <pc:docMk/>
-          <pc:sldMk cId="335451174" sldId="257"/>
-        </pc:sldMkLst>
-      </pc:sldChg>
-      <pc:sldChg chg="addSp delSp modSp new del mod ord">
-        <pc:chgData name="Noritsuna Imamura" userId="5b2da16fa1785921" providerId="LiveId" clId="{0D468939-C473-42F4-B7BF-FD9FD8C90BA5}" dt="2024-08-14T12:19:53.614" v="405" actId="47"/>
-        <pc:sldMkLst>
-          <pc:docMk/>
-          <pc:sldMk cId="1241730580" sldId="258"/>
-        </pc:sldMkLst>
       </pc:sldChg>
     </pc:docChg>
   </pc:docChgLst>
@@ -580,7 +368,7 @@
           <a:p>
             <a:fld id="{0053FBD2-6076-4FAC-9771-51767AF64FAC}" type="datetimeFigureOut">
               <a:rPr kumimoji="1" lang="ja-JP" altLang="en-US" smtClean="0"/>
-              <a:t>2025/8/13</a:t>
+              <a:t>2026/3/5</a:t>
             </a:fld>
             <a:endParaRPr kumimoji="1" lang="ja-JP" altLang="en-US"/>
           </a:p>
@@ -810,7 +598,7 @@
           <a:p>
             <a:fld id="{0053FBD2-6076-4FAC-9771-51767AF64FAC}" type="datetimeFigureOut">
               <a:rPr kumimoji="1" lang="ja-JP" altLang="en-US" smtClean="0"/>
-              <a:t>2025/8/13</a:t>
+              <a:t>2026/3/5</a:t>
             </a:fld>
             <a:endParaRPr kumimoji="1" lang="ja-JP" altLang="en-US"/>
           </a:p>
@@ -1050,7 +838,7 @@
           <a:p>
             <a:fld id="{0053FBD2-6076-4FAC-9771-51767AF64FAC}" type="datetimeFigureOut">
               <a:rPr kumimoji="1" lang="ja-JP" altLang="en-US" smtClean="0"/>
-              <a:t>2025/8/13</a:t>
+              <a:t>2026/3/5</a:t>
             </a:fld>
             <a:endParaRPr kumimoji="1" lang="ja-JP" altLang="en-US"/>
           </a:p>
@@ -1280,7 +1068,7 @@
           <a:p>
             <a:fld id="{0053FBD2-6076-4FAC-9771-51767AF64FAC}" type="datetimeFigureOut">
               <a:rPr kumimoji="1" lang="ja-JP" altLang="en-US" smtClean="0"/>
-              <a:t>2025/8/13</a:t>
+              <a:t>2026/3/5</a:t>
             </a:fld>
             <a:endParaRPr kumimoji="1" lang="ja-JP" altLang="en-US"/>
           </a:p>
@@ -1555,7 +1343,7 @@
           <a:p>
             <a:fld id="{0053FBD2-6076-4FAC-9771-51767AF64FAC}" type="datetimeFigureOut">
               <a:rPr kumimoji="1" lang="ja-JP" altLang="en-US" smtClean="0"/>
-              <a:t>2025/8/13</a:t>
+              <a:t>2026/3/5</a:t>
             </a:fld>
             <a:endParaRPr kumimoji="1" lang="ja-JP" altLang="en-US"/>
           </a:p>
@@ -1884,7 +1672,7 @@
           <a:p>
             <a:fld id="{0053FBD2-6076-4FAC-9771-51767AF64FAC}" type="datetimeFigureOut">
               <a:rPr kumimoji="1" lang="ja-JP" altLang="en-US" smtClean="0"/>
-              <a:t>2025/8/13</a:t>
+              <a:t>2026/3/5</a:t>
             </a:fld>
             <a:endParaRPr kumimoji="1" lang="ja-JP" altLang="en-US"/>
           </a:p>
@@ -2360,7 +2148,7 @@
           <a:p>
             <a:fld id="{0053FBD2-6076-4FAC-9771-51767AF64FAC}" type="datetimeFigureOut">
               <a:rPr kumimoji="1" lang="ja-JP" altLang="en-US" smtClean="0"/>
-              <a:t>2025/8/13</a:t>
+              <a:t>2026/3/5</a:t>
             </a:fld>
             <a:endParaRPr kumimoji="1" lang="ja-JP" altLang="en-US"/>
           </a:p>
@@ -2501,7 +2289,7 @@
           <a:p>
             <a:fld id="{0053FBD2-6076-4FAC-9771-51767AF64FAC}" type="datetimeFigureOut">
               <a:rPr kumimoji="1" lang="ja-JP" altLang="en-US" smtClean="0"/>
-              <a:t>2025/8/13</a:t>
+              <a:t>2026/3/5</a:t>
             </a:fld>
             <a:endParaRPr kumimoji="1" lang="ja-JP" altLang="en-US"/>
           </a:p>
@@ -2614,7 +2402,7 @@
           <a:p>
             <a:fld id="{0053FBD2-6076-4FAC-9771-51767AF64FAC}" type="datetimeFigureOut">
               <a:rPr kumimoji="1" lang="ja-JP" altLang="en-US" smtClean="0"/>
-              <a:t>2025/8/13</a:t>
+              <a:t>2026/3/5</a:t>
             </a:fld>
             <a:endParaRPr kumimoji="1" lang="ja-JP" altLang="en-US"/>
           </a:p>
@@ -2957,7 +2745,7 @@
           <a:p>
             <a:fld id="{0053FBD2-6076-4FAC-9771-51767AF64FAC}" type="datetimeFigureOut">
               <a:rPr kumimoji="1" lang="ja-JP" altLang="en-US" smtClean="0"/>
-              <a:t>2025/8/13</a:t>
+              <a:t>2026/3/5</a:t>
             </a:fld>
             <a:endParaRPr kumimoji="1" lang="ja-JP" altLang="en-US"/>
           </a:p>
@@ -3245,7 +3033,7 @@
           <a:p>
             <a:fld id="{0053FBD2-6076-4FAC-9771-51767AF64FAC}" type="datetimeFigureOut">
               <a:rPr kumimoji="1" lang="ja-JP" altLang="en-US" smtClean="0"/>
-              <a:t>2025/8/13</a:t>
+              <a:t>2026/3/5</a:t>
             </a:fld>
             <a:endParaRPr kumimoji="1" lang="ja-JP" altLang="en-US"/>
           </a:p>
@@ -3518,7 +3306,7 @@
           <a:p>
             <a:fld id="{0053FBD2-6076-4FAC-9771-51767AF64FAC}" type="datetimeFigureOut">
               <a:rPr kumimoji="1" lang="ja-JP" altLang="en-US" smtClean="0"/>
-              <a:t>2025/8/13</a:t>
+              <a:t>2026/3/5</a:t>
             </a:fld>
             <a:endParaRPr kumimoji="1" lang="ja-JP" altLang="en-US"/>
           </a:p>
@@ -4031,13 +3819,13 @@
         </p:nvSpPr>
         <p:spPr>
           <a:xfrm>
-            <a:off x="9115655" y="4486281"/>
+            <a:off x="8843952" y="4492123"/>
             <a:ext cx="1865376" cy="749808"/>
           </a:xfrm>
           <a:prstGeom prst="wedgeRectCallout">
             <a:avLst>
-              <a:gd name="adj1" fmla="val -99174"/>
-              <a:gd name="adj2" fmla="val 50449"/>
+              <a:gd name="adj1" fmla="val -81647"/>
+              <a:gd name="adj2" fmla="val 36142"/>
             </a:avLst>
           </a:prstGeom>
         </p:spPr>
@@ -4098,13 +3886,13 @@
         </p:nvSpPr>
         <p:spPr>
           <a:xfrm>
-            <a:off x="1730220" y="130622"/>
+            <a:off x="2308986" y="0"/>
             <a:ext cx="1865376" cy="749808"/>
           </a:xfrm>
           <a:prstGeom prst="wedgeRectCallout">
             <a:avLst>
-              <a:gd name="adj1" fmla="val 61776"/>
-              <a:gd name="adj2" fmla="val 100161"/>
+              <a:gd name="adj1" fmla="val 57394"/>
+              <a:gd name="adj2" fmla="val 111743"/>
             </a:avLst>
           </a:prstGeom>
         </p:spPr>
@@ -4589,8 +4377,8 @@
         </p:nvSpPr>
         <p:spPr>
           <a:xfrm>
-            <a:off x="8619634" y="5301400"/>
-            <a:ext cx="2570450" cy="1491289"/>
+            <a:off x="8495237" y="5301400"/>
+            <a:ext cx="2214092" cy="1491289"/>
           </a:xfrm>
           <a:prstGeom prst="wedgeRectCallout">
             <a:avLst>
@@ -4668,7 +4456,7 @@
             <a:pPr algn="ctr"/>
             <a:r>
               <a:rPr lang="en-US" altLang="ja-JP" dirty="0"/>
-              <a:t>4chMUX+Inverter</a:t>
+              <a:t>MUX+Inverter</a:t>
             </a:r>
             <a:r>
               <a:rPr lang="ja-JP" altLang="en-US" dirty="0"/>
@@ -4692,13 +4480,13 @@
         </p:nvSpPr>
         <p:spPr>
           <a:xfrm>
-            <a:off x="1724375" y="4111377"/>
-            <a:ext cx="1865376" cy="749808"/>
+            <a:off x="2172921" y="4334968"/>
+            <a:ext cx="1699259" cy="749808"/>
           </a:xfrm>
           <a:prstGeom prst="wedgeRectCallout">
             <a:avLst>
-              <a:gd name="adj1" fmla="val 61776"/>
-              <a:gd name="adj2" fmla="val 100161"/>
+              <a:gd name="adj1" fmla="val 51671"/>
+              <a:gd name="adj2" fmla="val 65415"/>
             </a:avLst>
           </a:prstGeom>
         </p:spPr>
@@ -4758,13 +4546,13 @@
         </p:nvSpPr>
         <p:spPr>
           <a:xfrm>
-            <a:off x="6680364" y="6047044"/>
+            <a:off x="6368754" y="6047044"/>
             <a:ext cx="1865376" cy="749808"/>
           </a:xfrm>
           <a:prstGeom prst="wedgeRectCallout">
             <a:avLst>
-              <a:gd name="adj1" fmla="val -28520"/>
-              <a:gd name="adj2" fmla="val -104885"/>
+              <a:gd name="adj1" fmla="val -17018"/>
+              <a:gd name="adj2" fmla="val -106247"/>
             </a:avLst>
           </a:prstGeom>
         </p:spPr>
@@ -5023,12 +4811,12 @@
         </p:nvSpPr>
         <p:spPr>
           <a:xfrm>
-            <a:off x="1624404" y="1736695"/>
-            <a:ext cx="1865376" cy="749808"/>
+            <a:off x="2109760" y="2000709"/>
+            <a:ext cx="1624751" cy="749808"/>
           </a:xfrm>
           <a:prstGeom prst="wedgeRectCallout">
             <a:avLst>
-              <a:gd name="adj1" fmla="val 61304"/>
+              <a:gd name="adj1" fmla="val 51445"/>
               <a:gd name="adj2" fmla="val 113128"/>
             </a:avLst>
           </a:prstGeom>
@@ -5090,13 +4878,13 @@
         </p:nvSpPr>
         <p:spPr>
           <a:xfrm>
-            <a:off x="1358829" y="2679192"/>
+            <a:off x="4906540" y="2486503"/>
             <a:ext cx="2130951" cy="749808"/>
           </a:xfrm>
           <a:prstGeom prst="wedgeRectCallout">
             <a:avLst>
-              <a:gd name="adj1" fmla="val 61776"/>
-              <a:gd name="adj2" fmla="val 100161"/>
+              <a:gd name="adj1" fmla="val -73907"/>
+              <a:gd name="adj2" fmla="val 117875"/>
             </a:avLst>
           </a:prstGeom>
         </p:spPr>
@@ -5156,13 +4944,13 @@
         </p:nvSpPr>
         <p:spPr>
           <a:xfrm>
-            <a:off x="1724375" y="5257058"/>
-            <a:ext cx="1865376" cy="749808"/>
+            <a:off x="2172921" y="5221580"/>
+            <a:ext cx="1681902" cy="749808"/>
           </a:xfrm>
           <a:prstGeom prst="wedgeRectCallout">
             <a:avLst>
-              <a:gd name="adj1" fmla="val 90805"/>
-              <a:gd name="adj2" fmla="val 2736"/>
+              <a:gd name="adj1" fmla="val 80399"/>
+              <a:gd name="adj2" fmla="val 1374"/>
             </a:avLst>
           </a:prstGeom>
         </p:spPr>
@@ -5222,13 +5010,13 @@
         </p:nvSpPr>
         <p:spPr>
           <a:xfrm>
-            <a:off x="2801824" y="6057529"/>
+            <a:off x="2490214" y="6057529"/>
             <a:ext cx="1865376" cy="749808"/>
           </a:xfrm>
           <a:prstGeom prst="wedgeRectCallout">
             <a:avLst>
-              <a:gd name="adj1" fmla="val 87320"/>
-              <a:gd name="adj2" fmla="val -108973"/>
+              <a:gd name="adj1" fmla="val 102382"/>
+              <a:gd name="adj2" fmla="val -111698"/>
             </a:avLst>
           </a:prstGeom>
         </p:spPr>
@@ -5289,13 +5077,13 @@
         </p:nvSpPr>
         <p:spPr>
           <a:xfrm>
-            <a:off x="4741094" y="6047044"/>
+            <a:off x="4429484" y="6047044"/>
             <a:ext cx="1865376" cy="749808"/>
           </a:xfrm>
           <a:prstGeom prst="wedgeRectCallout">
             <a:avLst>
-              <a:gd name="adj1" fmla="val 28715"/>
-              <a:gd name="adj2" fmla="val -100116"/>
+              <a:gd name="adj1" fmla="val 43229"/>
+              <a:gd name="adj2" fmla="val -103523"/>
             </a:avLst>
           </a:prstGeom>
         </p:spPr>
